--- a/carpentry/intake-142/PowerPoint/Day-20_2026-12-02_Week-6.pptx
+++ b/carpentry/intake-142/PowerPoint/Day-20_2026-12-02_Week-6.pptx
@@ -1277,7 +1277,7 @@
           <a:p/>
           <a:p>
             <a:r>
-              <a:t>Figure 12.3 on page 190 shows the three corners of a triangle arranged together on a straight line. The angles are 50, 60 and 70 degrees. Adding them gives 180, the measure of a straight angle. The corners do not become different angles when moved; their arrangement helps us see the total. Why is this useful for a missing angle? Once two interior angles are known, the third must supply whatever remains of 180. The picture supports the rule for triangles; it is not a rule that any three angles on a drawing automatically add to 180.</a:t>
+              <a:t>Figure 12.3 on page 300 shows the three corners of a triangle arranged together on a straight line. The angles are 50, 60 and 70 degrees. Adding them gives 180, the measure of a straight angle. The corners do not become different angles when moved; their arrangement helps us see the total. Why is this useful for a missing angle? Once two interior angles are known, the third must supply whatever remains of 180. The picture supports the rule for triangles; it is not a rule that any three angles on a drawing automatically add to 180.</a:t>
             </a:r>
           </a:p>
         </p:txBody>
@@ -2909,7 +2909,7 @@
           <a:p/>
           <a:p>
             <a:r>
-              <a:t>Figure 12.5 on page 192 draws a square on each side of a 3–4–5 right triangle. The smaller square areas are 3 squared, or 9, and 4 squared, or 16. Together they make 25, the area of the square on side 5. What is being added: the side lengths or the square areas? The square areas. That is why 3 plus 4 does not need to equal 5. When the largest square area is known, taking its square root recovers the side length. The diagram helps us remember both the squares and the final root.</a:t>
+              <a:t>Figure 12.5 on page 302 draws a square on each side of a 3–4–5 right triangle. The smaller square areas are 3 squared, or 9, and 4 squared, or 16. Together they make 25, the area of the square on side 5. What is being added: the side lengths or the square areas? The square areas. That is why 3 plus 4 does not need to equal 5. When the largest square area is known, taking its square root recovers the side length. The diagram helps us remember both the squares and the final root.</a:t>
             </a:r>
           </a:p>
         </p:txBody>
@@ -2985,7 +2985,7 @@
           <a:p/>
           <a:p>
             <a:r>
-              <a:t>Example 12.4 on page 192 asks for the sloping edge of a gusset whose legs are 400 and 250 millimetres. Identify that edge as the hypotenuse before calculating. Its square is 400 squared plus 250 squared: 160,000 plus 62,500 equals 222,500. Now take the root of the whole result: about 471.70 millimetres to two decimals. Why does 222,500 alone not answer the question? It is the squared length, not the length. Our answer is longer than 400 millimetres, which fits the requirement that the hypotenuse be the longest side.</a:t>
+              <a:t>Example 12.4 on page 302 asks for the sloping edge of a gusset whose legs are 400 and 250 millimetres. Identify that edge as the hypotenuse before calculating. Its square is 400 squared plus 250 squared: 160,000 plus 62,500 equals 222,500. Now take the root of the whole result: about 471.70 millimetres to two decimals. Why does 222,500 alone not answer the question? It is the squared length, not the length. Our answer is longer than 400 millimetres, which fits the requirement that the hypotenuse be the longest side.</a:t>
             </a:r>
           </a:p>
         </p:txBody>
@@ -5563,7 +5563,7 @@
                 </a:solidFill>
                 <a:latin typeface="Arial"/>
               </a:rPr>
-              <a:t>Textbook  |  page 190</a:t>
+              <a:t>Textbook  |  page 300</a:t>
             </a:r>
           </a:p>
         </p:txBody>
@@ -5611,7 +5611,7 @@
                 </a:solidFill>
                 <a:latin typeface="Arial"/>
               </a:rPr>
-              <a:t>Textbook sections 12.1–12.3 pp.188–190</a:t>
+              <a:t>Textbook sections 12.1–12.3 pp.298–300</a:t>
             </a:r>
           </a:p>
         </p:txBody>
@@ -5683,7 +5683,7 @@
                 </a:solidFill>
                 <a:latin typeface="Arial"/>
               </a:rPr>
-              <a:t>Textbook p.190 • Example 12.3 — Find the missing gusset angle</a:t>
+              <a:t>Textbook p.300 • Example 12.3 — Find the missing gusset angle</a:t>
             </a:r>
           </a:p>
         </p:txBody>
@@ -6297,7 +6297,7 @@
                 </a:solidFill>
                 <a:latin typeface="Arial"/>
               </a:rPr>
-              <a:t>Textbook sections 12.1–12.3 pp.188–190</a:t>
+              <a:t>Textbook sections 12.1–12.3 pp.298–300</a:t>
             </a:r>
           </a:p>
         </p:txBody>
@@ -7055,7 +7055,7 @@
                 </a:solidFill>
                 <a:latin typeface="Arial"/>
               </a:rPr>
-              <a:t>Textbook sections 12.1–12.3 pp.188–190</a:t>
+              <a:t>Textbook sections 12.1–12.3 pp.298–300</a:t>
             </a:r>
           </a:p>
         </p:txBody>
@@ -7255,7 +7255,7 @@
                 </a:solidFill>
                 <a:latin typeface="Arial"/>
               </a:rPr>
-              <a:t>Resources: Exercise Book 12A Q1–9 (pp.75–76); 12B Q2 (p.77); 12C Q3–4 (p.79)</a:t>
+              <a:t>Resources: Exercise Book 12A Q1–9 (pp.114–115); 12B Q2 (p.116); 12C Q3–4 (p.118)</a:t>
             </a:r>
           </a:p>
         </p:txBody>
@@ -7869,7 +7869,7 @@
                 </a:solidFill>
                 <a:latin typeface="Arial"/>
               </a:rPr>
-              <a:t>Textbook sections 12.1–12.3 pp.188–190</a:t>
+              <a:t>Textbook sections 12.1–12.3 pp.298–300</a:t>
             </a:r>
           </a:p>
         </p:txBody>
@@ -8625,7 +8625,7 @@
                 </a:solidFill>
                 <a:latin typeface="Arial"/>
               </a:rPr>
-              <a:t>Textbook sections 12.1–12.3 pp.188–190</a:t>
+              <a:t>Textbook sections 12.1–12.3 pp.298–300</a:t>
             </a:r>
           </a:p>
         </p:txBody>
@@ -9359,7 +9359,7 @@
                 </a:solidFill>
                 <a:latin typeface="Arial"/>
               </a:rPr>
-              <a:t>Textbook sections 12.1–12.3 pp.188–190</a:t>
+              <a:t>Textbook sections 12.1–12.3 pp.298–300</a:t>
             </a:r>
           </a:p>
         </p:txBody>
@@ -9559,7 +9559,7 @@
                 </a:solidFill>
                 <a:latin typeface="Arial"/>
               </a:rPr>
-              <a:t>Resources: Exercise Book 12A Q1–9 (pp.75–76); 12B Q2 (p.77); 12C Q3–4 (p.79)</a:t>
+              <a:t>Resources: Exercise Book 12A Q1–9 (pp.114–115); 12B Q2 (p.116); 12C Q3–4 (p.118)</a:t>
             </a:r>
           </a:p>
         </p:txBody>
@@ -10173,7 +10173,7 @@
                 </a:solidFill>
                 <a:latin typeface="Arial"/>
               </a:rPr>
-              <a:t>Textbook sections 12.1–12.3 pp.188–190</a:t>
+              <a:t>Textbook sections 12.1–12.3 pp.298–300</a:t>
             </a:r>
           </a:p>
         </p:txBody>
@@ -10949,7 +10949,7 @@
                 </a:solidFill>
                 <a:latin typeface="Arial"/>
               </a:rPr>
-              <a:t>Textbook sections 12.1–12.3 pp.188–190</a:t>
+              <a:t>Textbook sections 12.1–12.3 pp.298–300</a:t>
             </a:r>
           </a:p>
         </p:txBody>
@@ -11908,7 +11908,7 @@
                 </a:solidFill>
                 <a:latin typeface="Arial"/>
               </a:rPr>
-              <a:t>Textbook sections 12.1–12.3 pp.188–190</a:t>
+              <a:t>Textbook sections 12.1–12.3 pp.298–300</a:t>
             </a:r>
           </a:p>
         </p:txBody>
@@ -12619,7 +12619,7 @@
                 </a:solidFill>
                 <a:latin typeface="Arial"/>
               </a:rPr>
-              <a:t>Textbook sections 12.1–12.3 pp.188–190</a:t>
+              <a:t>Textbook sections 12.1–12.3 pp.298–300</a:t>
             </a:r>
           </a:p>
         </p:txBody>
@@ -16658,7 +16658,7 @@
                 </a:solidFill>
                 <a:latin typeface="Arial"/>
               </a:rPr>
-              <a:t>Textbook sections 12.1–12.3 pp.188–190</a:t>
+              <a:t>Textbook sections 12.1–12.3 pp.298–300</a:t>
             </a:r>
           </a:p>
         </p:txBody>
@@ -16858,7 +16858,7 @@
                 </a:solidFill>
                 <a:latin typeface="Arial"/>
               </a:rPr>
-              <a:t>Resources: Exercise Book 12A Q1–9 (pp.75–76); 12B Q2 (p.77); 12C Q3–4 (p.79)</a:t>
+              <a:t>Resources: Exercise Book 12A Q1–9 (pp.114–115); 12B Q2 (p.116); 12C Q3–4 (p.118)</a:t>
             </a:r>
           </a:p>
         </p:txBody>
@@ -17472,7 +17472,7 @@
                 </a:solidFill>
                 <a:latin typeface="Arial"/>
               </a:rPr>
-              <a:t>Textbook sections 12.1–12.3 pp.188–190</a:t>
+              <a:t>Textbook sections 12.1–12.3 pp.298–300</a:t>
             </a:r>
           </a:p>
         </p:txBody>
@@ -18183,7 +18183,7 @@
                 </a:solidFill>
                 <a:latin typeface="Arial"/>
               </a:rPr>
-              <a:t>Textbook sections 12.1–12.3 pp.188–190</a:t>
+              <a:t>Textbook sections 12.1–12.3 pp.298–300</a:t>
             </a:r>
           </a:p>
         </p:txBody>
@@ -18894,7 +18894,7 @@
                 </a:solidFill>
                 <a:latin typeface="Arial"/>
               </a:rPr>
-              <a:t>Textbook sections 12.1–12.3 pp.188–190</a:t>
+              <a:t>Textbook sections 12.1–12.3 pp.298–300</a:t>
             </a:r>
           </a:p>
         </p:txBody>
@@ -19580,7 +19580,7 @@
                 </a:solidFill>
                 <a:latin typeface="Arial"/>
               </a:rPr>
-              <a:t>Textbook sections 12.1–12.3 pp.188–190</a:t>
+              <a:t>Textbook sections 12.1–12.3 pp.298–300</a:t>
             </a:r>
           </a:p>
         </p:txBody>
@@ -19780,7 +19780,7 @@
                 </a:solidFill>
                 <a:latin typeface="Arial"/>
               </a:rPr>
-              <a:t>Resources: Exercise Book 12A Q1–9 (pp.75–76); 12B Q2 (p.77); 12C Q3–4 (p.79)</a:t>
+              <a:t>Resources: Exercise Book 12A Q1–9 (pp.114–115); 12B Q2 (p.116); 12C Q3–4 (p.118)</a:t>
             </a:r>
           </a:p>
         </p:txBody>
@@ -21059,7 +21059,7 @@
                 </a:solidFill>
                 <a:latin typeface="Arial"/>
               </a:rPr>
-              <a:t>Textbook sections 12.4 pp.191–193; calculator roots pp.31–33</a:t>
+              <a:t>Textbook sections 12.4 pp.301–303; calculator roots pp.51–53</a:t>
             </a:r>
           </a:p>
         </p:txBody>
@@ -21259,7 +21259,7 @@
                 </a:solidFill>
                 <a:latin typeface="Arial"/>
               </a:rPr>
-              <a:t>Textbook sections 12.4 pp.191–193; calculator roots pp.31–33</a:t>
+              <a:t>Textbook sections 12.4 pp.301–303; calculator roots pp.51–53</a:t>
             </a:r>
           </a:p>
         </p:txBody>
@@ -21307,7 +21307,7 @@
                 </a:solidFill>
                 <a:latin typeface="Arial"/>
               </a:rPr>
-              <a:t>Exercise Book 12A Q10–16 (p.76); 12B Q3 (p.77); 12C Q1–2 (p.79)</a:t>
+              <a:t>Exercise Book 12A Q10–16 (p.115); 12B Q3 (p.116); 12C Q1–2 (p.118)</a:t>
             </a:r>
           </a:p>
         </p:txBody>
@@ -21969,7 +21969,7 @@
                 </a:solidFill>
                 <a:latin typeface="Arial"/>
               </a:rPr>
-              <a:t>Textbook sections 12.4 pp.191–193; calculator roots pp.31–33</a:t>
+              <a:t>Textbook sections 12.4 pp.301–303; calculator roots pp.51–53</a:t>
             </a:r>
           </a:p>
         </p:txBody>
@@ -22169,7 +22169,7 @@
                 </a:solidFill>
                 <a:latin typeface="Arial"/>
               </a:rPr>
-              <a:t>Resources: Exercise Book 12A Q10–16 (p.76); 12B Q3 (p.77); 12C Q1–2 (p.79)</a:t>
+              <a:t>Resources: Exercise Book 12A Q10–16 (p.115); 12B Q3 (p.116); 12C Q1–2 (p.118)</a:t>
             </a:r>
           </a:p>
         </p:txBody>
@@ -22918,7 +22918,7 @@
                 </a:solidFill>
                 <a:latin typeface="Arial"/>
               </a:rPr>
-              <a:t>Textbook sections 12.4 pp.191–193; calculator roots pp.31–33</a:t>
+              <a:t>Textbook sections 12.4 pp.301–303; calculator roots pp.51–53</a:t>
             </a:r>
           </a:p>
         </p:txBody>
@@ -24163,7 +24163,7 @@
                 </a:solidFill>
                 <a:latin typeface="Arial"/>
               </a:rPr>
-              <a:t>Textbook sections 12.4 pp.191–193; calculator roots pp.31–33</a:t>
+              <a:t>Textbook sections 12.4 pp.301–303; calculator roots pp.51–53</a:t>
             </a:r>
           </a:p>
         </p:txBody>
@@ -25228,7 +25228,7 @@
                 </a:solidFill>
                 <a:latin typeface="Arial"/>
               </a:rPr>
-              <a:t>Textbook sections 12.1–12.3 pp.188–190</a:t>
+              <a:t>Textbook sections 12.1–12.3 pp.298–300</a:t>
             </a:r>
           </a:p>
         </p:txBody>
@@ -25428,7 +25428,7 @@
                 </a:solidFill>
                 <a:latin typeface="Arial"/>
               </a:rPr>
-              <a:t>Textbook sections 12.1–12.3 pp.188–190</a:t>
+              <a:t>Textbook sections 12.1–12.3 pp.298–300</a:t>
             </a:r>
           </a:p>
         </p:txBody>
@@ -25476,7 +25476,7 @@
                 </a:solidFill>
                 <a:latin typeface="Arial"/>
               </a:rPr>
-              <a:t>Exercise Book 12A Q1–9 (pp.75–76); 12B Q2 (p.77); 12C Q3–4 (p.79)</a:t>
+              <a:t>Exercise Book 12A Q1–9 (pp.114–115); 12B Q2 (p.116); 12C Q3–4 (p.118)</a:t>
             </a:r>
           </a:p>
         </p:txBody>
@@ -27168,7 +27168,7 @@
                 </a:solidFill>
                 <a:latin typeface="Arial"/>
               </a:rPr>
-              <a:t>Textbook  |  page 192</a:t>
+              <a:t>Textbook  |  page 302</a:t>
             </a:r>
           </a:p>
         </p:txBody>
@@ -27216,7 +27216,7 @@
                 </a:solidFill>
                 <a:latin typeface="Arial"/>
               </a:rPr>
-              <a:t>Textbook sections 12.4 pp.191–193; calculator roots pp.31–33</a:t>
+              <a:t>Textbook sections 12.4 pp.301–303; calculator roots pp.51–53</a:t>
             </a:r>
           </a:p>
         </p:txBody>
@@ -27288,7 +27288,7 @@
                 </a:solidFill>
                 <a:latin typeface="Arial"/>
               </a:rPr>
-              <a:t>Textbook p.192 • Figure 12.5 — Squares on a 3–4–5 triangle</a:t>
+              <a:t>Textbook p.302 • Figure 12.5 — Squares on a 3–4–5 triangle</a:t>
             </a:r>
           </a:p>
         </p:txBody>
@@ -27854,7 +27854,7 @@
                 </a:solidFill>
                 <a:latin typeface="Arial"/>
               </a:rPr>
-              <a:t>Textbook  |  page 192</a:t>
+              <a:t>Textbook  |  page 302</a:t>
             </a:r>
           </a:p>
         </p:txBody>
@@ -27902,7 +27902,7 @@
                 </a:solidFill>
                 <a:latin typeface="Arial"/>
               </a:rPr>
-              <a:t>Textbook sections 12.4 pp.191–193; calculator roots pp.31–33</a:t>
+              <a:t>Textbook sections 12.4 pp.301–303; calculator roots pp.51–53</a:t>
             </a:r>
           </a:p>
         </p:txBody>
@@ -27974,7 +27974,7 @@
                 </a:solidFill>
                 <a:latin typeface="Arial"/>
               </a:rPr>
-              <a:t>Textbook p.192 • Example 12.4 — Find a gusset hypotenuse</a:t>
+              <a:t>Textbook p.302 • Example 12.4 — Find a gusset hypotenuse</a:t>
             </a:r>
           </a:p>
         </p:txBody>
@@ -28588,7 +28588,7 @@
                 </a:solidFill>
                 <a:latin typeface="Arial"/>
               </a:rPr>
-              <a:t>Textbook sections 12.4 pp.191–193; calculator roots pp.31–33</a:t>
+              <a:t>Textbook sections 12.4 pp.301–303; calculator roots pp.51–53</a:t>
             </a:r>
           </a:p>
         </p:txBody>
@@ -29346,7 +29346,7 @@
                 </a:solidFill>
                 <a:latin typeface="Arial"/>
               </a:rPr>
-              <a:t>Textbook sections 12.4 pp.191–193; calculator roots pp.31–33</a:t>
+              <a:t>Textbook sections 12.4 pp.301–303; calculator roots pp.51–53</a:t>
             </a:r>
           </a:p>
         </p:txBody>
@@ -29546,7 +29546,7 @@
                 </a:solidFill>
                 <a:latin typeface="Arial"/>
               </a:rPr>
-              <a:t>Resources: Exercise Book 12A Q10–16 (p.76); 12B Q3 (p.77); 12C Q1–2 (p.79)</a:t>
+              <a:t>Resources: Exercise Book 12A Q10–16 (p.115); 12B Q3 (p.116); 12C Q1–2 (p.118)</a:t>
             </a:r>
           </a:p>
         </p:txBody>
@@ -30160,7 +30160,7 @@
                 </a:solidFill>
                 <a:latin typeface="Arial"/>
               </a:rPr>
-              <a:t>Textbook sections 12.4 pp.191–193; calculator roots pp.31–33</a:t>
+              <a:t>Textbook sections 12.4 pp.301–303; calculator roots pp.51–53</a:t>
             </a:r>
           </a:p>
         </p:txBody>
@@ -30916,7 +30916,7 @@
                 </a:solidFill>
                 <a:latin typeface="Arial"/>
               </a:rPr>
-              <a:t>Textbook sections 12.4 pp.191–193; calculator roots pp.31–33</a:t>
+              <a:t>Textbook sections 12.4 pp.301–303; calculator roots pp.51–53</a:t>
             </a:r>
           </a:p>
         </p:txBody>
@@ -31650,7 +31650,7 @@
                 </a:solidFill>
                 <a:latin typeface="Arial"/>
               </a:rPr>
-              <a:t>Textbook sections 12.4 pp.191–193; calculator roots pp.31–33</a:t>
+              <a:t>Textbook sections 12.4 pp.301–303; calculator roots pp.51–53</a:t>
             </a:r>
           </a:p>
         </p:txBody>
@@ -31850,7 +31850,7 @@
                 </a:solidFill>
                 <a:latin typeface="Arial"/>
               </a:rPr>
-              <a:t>Resources: Exercise Book 12A Q10–16 (p.76); 12B Q3 (p.77); 12C Q1–2 (p.79)</a:t>
+              <a:t>Resources: Exercise Book 12A Q10–16 (p.115); 12B Q3 (p.116); 12C Q1–2 (p.118)</a:t>
             </a:r>
           </a:p>
         </p:txBody>
@@ -32464,7 +32464,7 @@
                 </a:solidFill>
                 <a:latin typeface="Arial"/>
               </a:rPr>
-              <a:t>Textbook sections 12.4 pp.191–193; calculator roots pp.31–33</a:t>
+              <a:t>Textbook sections 12.4 pp.301–303; calculator roots pp.51–53</a:t>
             </a:r>
           </a:p>
         </p:txBody>
@@ -33240,7 +33240,7 @@
                 </a:solidFill>
                 <a:latin typeface="Arial"/>
               </a:rPr>
-              <a:t>Textbook sections 12.4 pp.191–193; calculator roots pp.31–33</a:t>
+              <a:t>Textbook sections 12.4 pp.301–303; calculator roots pp.51–53</a:t>
             </a:r>
           </a:p>
         </p:txBody>
@@ -34199,7 +34199,7 @@
                 </a:solidFill>
                 <a:latin typeface="Arial"/>
               </a:rPr>
-              <a:t>Textbook sections 12.1–12.3 pp.188–190</a:t>
+              <a:t>Textbook sections 12.1–12.3 pp.298–300</a:t>
             </a:r>
           </a:p>
         </p:txBody>
@@ -34399,7 +34399,7 @@
                 </a:solidFill>
                 <a:latin typeface="Arial"/>
               </a:rPr>
-              <a:t>Resources: Exercise Book 12A Q1–9 (pp.75–76); 12B Q2 (p.77); 12C Q3–4 (p.79)</a:t>
+              <a:t>Resources: Exercise Book 12A Q1–9 (pp.114–115); 12B Q2 (p.116); 12C Q3–4 (p.118)</a:t>
             </a:r>
           </a:p>
         </p:txBody>
@@ -35013,7 +35013,7 @@
                 </a:solidFill>
                 <a:latin typeface="Arial"/>
               </a:rPr>
-              <a:t>Textbook sections 12.4 pp.191–193; calculator roots pp.31–33</a:t>
+              <a:t>Textbook sections 12.4 pp.301–303; calculator roots pp.51–53</a:t>
             </a:r>
           </a:p>
         </p:txBody>
@@ -35699,7 +35699,7 @@
                 </a:solidFill>
                 <a:latin typeface="Arial"/>
               </a:rPr>
-              <a:t>Textbook sections 12.4 pp.191–193; calculator roots pp.31–33</a:t>
+              <a:t>Textbook sections 12.4 pp.301–303; calculator roots pp.51–53</a:t>
             </a:r>
           </a:p>
         </p:txBody>
@@ -36386,7 +36386,7 @@
                 </a:solidFill>
                 <a:latin typeface="Arial"/>
               </a:rPr>
-              <a:t>Textbook sections 12.4 pp.191–193; calculator roots pp.31–33</a:t>
+              <a:t>Textbook sections 12.4 pp.301–303; calculator roots pp.51–53</a:t>
             </a:r>
           </a:p>
         </p:txBody>
@@ -36586,7 +36586,7 @@
                 </a:solidFill>
                 <a:latin typeface="Arial"/>
               </a:rPr>
-              <a:t>Resources: Exercise Book 12A Q10–16 (p.76); 12B Q3 (p.77); 12C Q1–2 (p.79)</a:t>
+              <a:t>Resources: Exercise Book 12A Q10–16 (p.115); 12B Q3 (p.116); 12C Q1–2 (p.118)</a:t>
             </a:r>
           </a:p>
         </p:txBody>
@@ -37200,7 +37200,7 @@
                 </a:solidFill>
                 <a:latin typeface="Arial"/>
               </a:rPr>
-              <a:t>Textbook sections 12.4 pp.191–193; calculator roots pp.31–33</a:t>
+              <a:t>Textbook sections 12.4 pp.301–303; calculator roots pp.51–53</a:t>
             </a:r>
           </a:p>
         </p:txBody>
@@ -37911,7 +37911,7 @@
                 </a:solidFill>
                 <a:latin typeface="Arial"/>
               </a:rPr>
-              <a:t>Textbook sections 12.4 pp.191–193; calculator roots pp.31–33</a:t>
+              <a:t>Textbook sections 12.4 pp.301–303; calculator roots pp.51–53</a:t>
             </a:r>
           </a:p>
         </p:txBody>
@@ -38622,7 +38622,7 @@
                 </a:solidFill>
                 <a:latin typeface="Arial"/>
               </a:rPr>
-              <a:t>Textbook sections 12.4 pp.191–193; calculator roots pp.31–33</a:t>
+              <a:t>Textbook sections 12.4 pp.301–303; calculator roots pp.51–53</a:t>
             </a:r>
           </a:p>
         </p:txBody>
@@ -38822,7 +38822,7 @@
                 </a:solidFill>
                 <a:latin typeface="Arial"/>
               </a:rPr>
-              <a:t>Resources: Exercise Book 12A Q10–16 (p.76); 12B Q3 (p.77); 12C Q1–2 (p.79)</a:t>
+              <a:t>Resources: Exercise Book 12A Q10–16 (p.115); 12B Q3 (p.116); 12C Q1–2 (p.118)</a:t>
             </a:r>
           </a:p>
         </p:txBody>
@@ -39436,7 +39436,7 @@
                 </a:solidFill>
                 <a:latin typeface="Arial"/>
               </a:rPr>
-              <a:t>Textbook sections 12.1–12.3 pp.188–190</a:t>
+              <a:t>Textbook sections 12.1–12.3 pp.298–300</a:t>
             </a:r>
           </a:p>
         </p:txBody>
@@ -40282,7 +40282,7 @@
                 </a:solidFill>
                 <a:latin typeface="Arial"/>
               </a:rPr>
-              <a:t>Textbook sections 12.1–12.3 pp.188–190</a:t>
+              <a:t>Textbook sections 12.1–12.3 pp.298–300</a:t>
             </a:r>
           </a:p>
         </p:txBody>
@@ -41527,7 +41527,7 @@
                 </a:solidFill>
                 <a:latin typeface="Arial"/>
               </a:rPr>
-              <a:t>Textbook sections 12.1–12.3 pp.188–190</a:t>
+              <a:t>Textbook sections 12.1–12.3 pp.298–300</a:t>
             </a:r>
           </a:p>
         </p:txBody>
@@ -42893,7 +42893,7 @@
                 <a:ea typeface="Arial" pitchFamily="34" charset="-122"/>
                 <a:cs typeface="Arial" pitchFamily="34" charset="-120"/>
               </a:rPr>
-              <a:t>Classroom examples demonstrate the three relationships • Textbook pp.188–190 • Sketch and label before calculating</a:t>
+              <a:t>Classroom examples demonstrate the three relationships • Textbook pp.298–300 • Sketch and label before calculating</a:t>
             </a:r>
             <a:endParaRPr lang="en-US" sz="1050" dirty="0"/>
           </a:p>
@@ -43465,7 +43465,7 @@
                 </a:solidFill>
                 <a:latin typeface="Arial"/>
               </a:rPr>
-              <a:t>Textbook  |  page 190</a:t>
+              <a:t>Textbook  |  page 300</a:t>
             </a:r>
           </a:p>
         </p:txBody>
@@ -43513,7 +43513,7 @@
                 </a:solidFill>
                 <a:latin typeface="Arial"/>
               </a:rPr>
-              <a:t>Textbook sections 12.1–12.3 pp.188–190</a:t>
+              <a:t>Textbook sections 12.1–12.3 pp.298–300</a:t>
             </a:r>
           </a:p>
         </p:txBody>
@@ -43585,7 +43585,7 @@
                 </a:solidFill>
                 <a:latin typeface="Arial"/>
               </a:rPr>
-              <a:t>Textbook p.190 • Figure 12.3 — Triangle corners form a straight angle</a:t>
+              <a:t>Textbook p.300 • Figure 12.3 — Triangle corners form a straight angle</a:t>
             </a:r>
           </a:p>
         </p:txBody>

--- a/carpentry/intake-142/PowerPoint/Day-20_2026-12-02_Week-6.pptx
+++ b/carpentry/intake-142/PowerPoint/Day-20_2026-12-02_Week-6.pptx
@@ -20053,6 +20053,104 @@
           </a:p>
         </p:txBody>
       </p:sp>
+      <p:sp>
+        <p:nvSpPr>
+          <p:cNvPr id="22" name="Play quiz W06-L05"/>
+          <p:cNvSpPr txBox="1"/>
+          <p:nvPr/>
+        </p:nvSpPr>
+        <p:spPr>
+          <a:xfrm>
+            <a:off x="6355080" y="6606540"/>
+            <a:ext cx="822960" cy="210312"/>
+          </a:xfrm>
+          <a:prstGeom prst="rect">
+            <a:avLst/>
+          </a:prstGeom>
+          <a:noFill/>
+        </p:spPr>
+        <p:txBody>
+          <a:bodyPr wrap="square" lIns="0" rIns="0" tIns="0" bIns="0" anchor="t">
+            <a:normAutofit fontScale="100000" lnSpcReduction="0"/>
+          </a:bodyPr>
+          <a:lstStyle/>
+          <a:p>
+            <a:pPr>
+              <a:spcBef>
+                <a:spcPts val="0"/>
+              </a:spcBef>
+              <a:spcAft>
+                <a:spcPts val="0"/>
+              </a:spcAft>
+              <a:defRPr sz="1000" b="0">
+                <a:solidFill>
+                  <a:srgbClr val="D0002B"/>
+                </a:solidFill>
+                <a:latin typeface="Arial"/>
+              </a:defRPr>
+            </a:pPr>
+            <a:r>
+              <a:rPr sz="1000">
+                <a:solidFill>
+                  <a:srgbClr val="F7F8FC"/>
+                </a:solidFill>
+                <a:latin typeface="Arial"/>
+                <a:hlinkClick r:id="rId8"/>
+              </a:rPr>
+              <a:t>Play quiz</a:t>
+            </a:r>
+          </a:p>
+        </p:txBody>
+      </p:sp>
+      <p:sp>
+        <p:nvSpPr>
+          <p:cNvPr id="23" name="Quiz PDF W06-L05"/>
+          <p:cNvSpPr txBox="1"/>
+          <p:nvPr/>
+        </p:nvSpPr>
+        <p:spPr>
+          <a:xfrm>
+            <a:off x="7296912" y="6606540"/>
+            <a:ext cx="1005840" cy="210312"/>
+          </a:xfrm>
+          <a:prstGeom prst="rect">
+            <a:avLst/>
+          </a:prstGeom>
+          <a:noFill/>
+        </p:spPr>
+        <p:txBody>
+          <a:bodyPr wrap="square" lIns="0" rIns="0" tIns="0" bIns="0" anchor="t">
+            <a:normAutofit fontScale="100000" lnSpcReduction="0"/>
+          </a:bodyPr>
+          <a:lstStyle/>
+          <a:p>
+            <a:pPr>
+              <a:spcBef>
+                <a:spcPts val="0"/>
+              </a:spcBef>
+              <a:spcAft>
+                <a:spcPts val="0"/>
+              </a:spcAft>
+              <a:defRPr sz="1000" b="0">
+                <a:solidFill>
+                  <a:srgbClr val="D0002B"/>
+                </a:solidFill>
+                <a:latin typeface="Arial"/>
+              </a:defRPr>
+            </a:pPr>
+            <a:r>
+              <a:rPr sz="1000">
+                <a:solidFill>
+                  <a:srgbClr val="F7F8FC"/>
+                </a:solidFill>
+                <a:latin typeface="Arial"/>
+                <a:hlinkClick r:id="rId9"/>
+              </a:rPr>
+              <a:t>Quiz PDF</a:t>
+            </a:r>
+          </a:p>
+        </p:txBody>
+      </p:sp>
     </p:spTree>
   </p:cSld>
   <p:clrMapOvr>
@@ -39091,6 +39189,104 @@
                 <a:latin typeface="Arial"/>
               </a:rPr>
               <a:t>Day 20  •  2026-12-02  •  45</a:t>
+            </a:r>
+          </a:p>
+        </p:txBody>
+      </p:sp>
+      <p:sp>
+        <p:nvSpPr>
+          <p:cNvPr id="22" name="Play quiz W06-L06"/>
+          <p:cNvSpPr txBox="1"/>
+          <p:nvPr/>
+        </p:nvSpPr>
+        <p:spPr>
+          <a:xfrm>
+            <a:off x="6355080" y="6606540"/>
+            <a:ext cx="822960" cy="210312"/>
+          </a:xfrm>
+          <a:prstGeom prst="rect">
+            <a:avLst/>
+          </a:prstGeom>
+          <a:noFill/>
+        </p:spPr>
+        <p:txBody>
+          <a:bodyPr wrap="square" lIns="0" rIns="0" tIns="0" bIns="0" anchor="t">
+            <a:normAutofit fontScale="100000" lnSpcReduction="0"/>
+          </a:bodyPr>
+          <a:lstStyle/>
+          <a:p>
+            <a:pPr>
+              <a:spcBef>
+                <a:spcPts val="0"/>
+              </a:spcBef>
+              <a:spcAft>
+                <a:spcPts val="0"/>
+              </a:spcAft>
+              <a:defRPr sz="1000" b="0">
+                <a:solidFill>
+                  <a:srgbClr val="D0002B"/>
+                </a:solidFill>
+                <a:latin typeface="Arial"/>
+              </a:defRPr>
+            </a:pPr>
+            <a:r>
+              <a:rPr sz="1000">
+                <a:solidFill>
+                  <a:srgbClr val="F7F8FC"/>
+                </a:solidFill>
+                <a:latin typeface="Arial"/>
+                <a:hlinkClick r:id="rId8"/>
+              </a:rPr>
+              <a:t>Play quiz</a:t>
+            </a:r>
+          </a:p>
+        </p:txBody>
+      </p:sp>
+      <p:sp>
+        <p:nvSpPr>
+          <p:cNvPr id="23" name="Quiz PDF W06-L06"/>
+          <p:cNvSpPr txBox="1"/>
+          <p:nvPr/>
+        </p:nvSpPr>
+        <p:spPr>
+          <a:xfrm>
+            <a:off x="7296912" y="6606540"/>
+            <a:ext cx="1005840" cy="210312"/>
+          </a:xfrm>
+          <a:prstGeom prst="rect">
+            <a:avLst/>
+          </a:prstGeom>
+          <a:noFill/>
+        </p:spPr>
+        <p:txBody>
+          <a:bodyPr wrap="square" lIns="0" rIns="0" tIns="0" bIns="0" anchor="t">
+            <a:normAutofit fontScale="100000" lnSpcReduction="0"/>
+          </a:bodyPr>
+          <a:lstStyle/>
+          <a:p>
+            <a:pPr>
+              <a:spcBef>
+                <a:spcPts val="0"/>
+              </a:spcBef>
+              <a:spcAft>
+                <a:spcPts val="0"/>
+              </a:spcAft>
+              <a:defRPr sz="1000" b="0">
+                <a:solidFill>
+                  <a:srgbClr val="D0002B"/>
+                </a:solidFill>
+                <a:latin typeface="Arial"/>
+              </a:defRPr>
+            </a:pPr>
+            <a:r>
+              <a:rPr sz="1000">
+                <a:solidFill>
+                  <a:srgbClr val="F7F8FC"/>
+                </a:solidFill>
+                <a:latin typeface="Arial"/>
+                <a:hlinkClick r:id="rId9"/>
+              </a:rPr>
+              <a:t>Quiz PDF</a:t>
             </a:r>
           </a:p>
         </p:txBody>
